--- a/knf/decks/d3p1.pptx
+++ b/knf/decks/d3p1.pptx
@@ -4868,7 +4868,7 @@
                 <a:ea typeface="Pretendard"/>
                 <a:cs typeface="Pretendard"/>
               </a:rPr>
-              <a:t>불량 기록을 설비 × PM 전/후 × 불량유형으로 쪼개, 무엇이 가장 늘었는지 찾습니다</a:t>
+              <a:t>불량 기록을 설비 × 8/10 전/후 × 불량유형으로 쪼개, 무엇이 가장 늘었는지 찾습니다</a:t>
             </a:r>
           </a:p>
         </p:txBody>
@@ -4984,7 +4984,7 @@
                 <a:ea typeface="Pretendard"/>
                 <a:cs typeface="Pretendard"/>
               </a:rPr>
-              <a:t>PM구분 열 만들기</a:t>
+              <a:t>기간구분 열 만들기</a:t>
             </a:r>
           </a:p>
         </p:txBody>

--- a/knf/decks/d3p1.pptx
+++ b/knf/decks/d3p1.pptx
@@ -5634,7 +5634,7 @@
                 <a:ea typeface="Pretendard"/>
                 <a:cs typeface="Pretendard"/>
               </a:rPr>
-              <a:t>45분 뒤에는</a:t>
+              <a:t>50분 뒤에는</a:t>
             </a:r>
           </a:p>
         </p:txBody>

--- a/knf/decks/d3p1.pptx
+++ b/knf/decks/d3p1.pptx
@@ -3100,7 +3100,7 @@
       <p:grpSpPr/>
       <p:sp>
         <p:nvSpPr>
-          <p:cNvPr id="2" name="Oval 1"/>
+          <p:cNvPr id="2" name="deckgen:decor"/>
           <p:cNvSpPr/>
           <p:nvPr/>
         </p:nvSpPr>
@@ -3130,7 +3130,7 @@
       </p:sp>
       <p:sp>
         <p:nvSpPr>
-          <p:cNvPr id="3" name="Oval 2"/>
+          <p:cNvPr id="3" name="deckgen:decor"/>
           <p:cNvSpPr/>
           <p:nvPr/>
         </p:nvSpPr>
@@ -3160,7 +3160,7 @@
       </p:sp>
       <p:sp>
         <p:nvSpPr>
-          <p:cNvPr id="4" name="Oval 3"/>
+          <p:cNvPr id="4" name="deckgen:decor"/>
           <p:cNvSpPr/>
           <p:nvPr/>
         </p:nvSpPr>
@@ -3190,7 +3190,7 @@
       </p:sp>
       <p:sp>
         <p:nvSpPr>
-          <p:cNvPr id="5" name="Rectangle 4"/>
+          <p:cNvPr id="5" name="deckgen:decor"/>
           <p:cNvSpPr/>
           <p:nvPr/>
         </p:nvSpPr>
@@ -3220,7 +3220,7 @@
       </p:sp>
       <p:sp>
         <p:nvSpPr>
-          <p:cNvPr id="6" name="Oval 5"/>
+          <p:cNvPr id="6" name="deckgen:decor"/>
           <p:cNvSpPr/>
           <p:nvPr/>
         </p:nvSpPr>
@@ -3250,7 +3250,7 @@
       </p:sp>
       <p:sp>
         <p:nvSpPr>
-          <p:cNvPr id="7" name="Oval 6"/>
+          <p:cNvPr id="7" name="deckgen:decor"/>
           <p:cNvSpPr/>
           <p:nvPr/>
         </p:nvSpPr>
@@ -3280,7 +3280,7 @@
       </p:sp>
       <p:sp>
         <p:nvSpPr>
-          <p:cNvPr id="8" name="Oval 7"/>
+          <p:cNvPr id="8" name="deckgen:decor"/>
           <p:cNvSpPr/>
           <p:nvPr/>
         </p:nvSpPr>
@@ -3310,7 +3310,7 @@
       </p:sp>
       <p:sp>
         <p:nvSpPr>
-          <p:cNvPr id="9" name="Oval 8"/>
+          <p:cNvPr id="9" name="deckgen:decor"/>
           <p:cNvSpPr/>
           <p:nvPr/>
         </p:nvSpPr>
@@ -3340,7 +3340,7 @@
       </p:sp>
       <p:sp>
         <p:nvSpPr>
-          <p:cNvPr id="10" name="Rectangle 9"/>
+          <p:cNvPr id="10" name="deckgen:decor"/>
           <p:cNvSpPr/>
           <p:nvPr/>
         </p:nvSpPr>
@@ -3600,7 +3600,7 @@
       <p:grpSpPr/>
       <p:sp>
         <p:nvSpPr>
-          <p:cNvPr id="2" name="Oval 1"/>
+          <p:cNvPr id="2" name="deckgen:decor"/>
           <p:cNvSpPr/>
           <p:nvPr/>
         </p:nvSpPr>
@@ -3630,7 +3630,7 @@
       </p:sp>
       <p:sp>
         <p:nvSpPr>
-          <p:cNvPr id="3" name="Oval 2"/>
+          <p:cNvPr id="3" name="deckgen:decor"/>
           <p:cNvSpPr/>
           <p:nvPr/>
         </p:nvSpPr>
@@ -3660,7 +3660,7 @@
       </p:sp>
       <p:sp>
         <p:nvSpPr>
-          <p:cNvPr id="4" name="Oval 3"/>
+          <p:cNvPr id="4" name="deckgen:decor"/>
           <p:cNvSpPr/>
           <p:nvPr/>
         </p:nvSpPr>
@@ -4662,7 +4662,7 @@
       <p:grpSpPr/>
       <p:sp>
         <p:nvSpPr>
-          <p:cNvPr id="2" name="Oval 1"/>
+          <p:cNvPr id="2" name="deckgen:decor"/>
           <p:cNvSpPr/>
           <p:nvPr/>
         </p:nvSpPr>
@@ -4692,7 +4692,7 @@
       </p:sp>
       <p:sp>
         <p:nvSpPr>
-          <p:cNvPr id="3" name="Oval 2"/>
+          <p:cNvPr id="3" name="deckgen:decor"/>
           <p:cNvSpPr/>
           <p:nvPr/>
         </p:nvSpPr>
@@ -5469,7 +5469,7 @@
       <p:grpSpPr/>
       <p:sp>
         <p:nvSpPr>
-          <p:cNvPr id="2" name="Oval 1"/>
+          <p:cNvPr id="2" name="deckgen:decor"/>
           <p:cNvSpPr/>
           <p:nvPr/>
         </p:nvSpPr>
@@ -5499,7 +5499,7 @@
       </p:sp>
       <p:sp>
         <p:nvSpPr>
-          <p:cNvPr id="3" name="Oval 2"/>
+          <p:cNvPr id="3" name="deckgen:decor"/>
           <p:cNvSpPr/>
           <p:nvPr/>
         </p:nvSpPr>
@@ -5529,7 +5529,7 @@
       </p:sp>
       <p:sp>
         <p:nvSpPr>
-          <p:cNvPr id="4" name="Oval 3"/>
+          <p:cNvPr id="4" name="deckgen:decor"/>
           <p:cNvSpPr/>
           <p:nvPr/>
         </p:nvSpPr>
@@ -6314,7 +6314,7 @@
       <p:grpSpPr/>
       <p:sp>
         <p:nvSpPr>
-          <p:cNvPr id="2" name="Oval 1"/>
+          <p:cNvPr id="2" name="deckgen:decor"/>
           <p:cNvSpPr/>
           <p:nvPr/>
         </p:nvSpPr>
@@ -6344,7 +6344,7 @@
       </p:sp>
       <p:sp>
         <p:nvSpPr>
-          <p:cNvPr id="3" name="Oval 2"/>
+          <p:cNvPr id="3" name="deckgen:decor"/>
           <p:cNvSpPr/>
           <p:nvPr/>
         </p:nvSpPr>
@@ -6374,7 +6374,7 @@
       </p:sp>
       <p:sp>
         <p:nvSpPr>
-          <p:cNvPr id="4" name="Oval 3"/>
+          <p:cNvPr id="4" name="deckgen:decor"/>
           <p:cNvSpPr/>
           <p:nvPr/>
         </p:nvSpPr>
@@ -8025,7 +8025,7 @@
       <p:grpSpPr/>
       <p:sp>
         <p:nvSpPr>
-          <p:cNvPr id="2" name="Oval 1"/>
+          <p:cNvPr id="2" name="deckgen:decor"/>
           <p:cNvSpPr/>
           <p:nvPr/>
         </p:nvSpPr>
@@ -8055,7 +8055,7 @@
       </p:sp>
       <p:sp>
         <p:nvSpPr>
-          <p:cNvPr id="3" name="Oval 2"/>
+          <p:cNvPr id="3" name="deckgen:decor"/>
           <p:cNvSpPr/>
           <p:nvPr/>
         </p:nvSpPr>
@@ -8085,7 +8085,7 @@
       </p:sp>
       <p:sp>
         <p:nvSpPr>
-          <p:cNvPr id="4" name="Oval 3"/>
+          <p:cNvPr id="4" name="deckgen:decor"/>
           <p:cNvSpPr/>
           <p:nvPr/>
         </p:nvSpPr>
@@ -9413,7 +9413,7 @@
       <p:grpSpPr/>
       <p:sp>
         <p:nvSpPr>
-          <p:cNvPr id="2" name="Oval 1"/>
+          <p:cNvPr id="2" name="deckgen:decor"/>
           <p:cNvSpPr/>
           <p:nvPr/>
         </p:nvSpPr>
@@ -9443,7 +9443,7 @@
       </p:sp>
       <p:sp>
         <p:nvSpPr>
-          <p:cNvPr id="3" name="Oval 2"/>
+          <p:cNvPr id="3" name="deckgen:decor"/>
           <p:cNvSpPr/>
           <p:nvPr/>
         </p:nvSpPr>
@@ -9473,7 +9473,7 @@
       </p:sp>
       <p:sp>
         <p:nvSpPr>
-          <p:cNvPr id="4" name="Oval 3"/>
+          <p:cNvPr id="4" name="deckgen:decor"/>
           <p:cNvSpPr/>
           <p:nvPr/>
         </p:nvSpPr>
@@ -11124,7 +11124,7 @@
       <p:grpSpPr/>
       <p:sp>
         <p:nvSpPr>
-          <p:cNvPr id="2" name="Oval 1"/>
+          <p:cNvPr id="2" name="deckgen:decor"/>
           <p:cNvSpPr/>
           <p:nvPr/>
         </p:nvSpPr>
@@ -11154,7 +11154,7 @@
       </p:sp>
       <p:sp>
         <p:nvSpPr>
-          <p:cNvPr id="3" name="Oval 2"/>
+          <p:cNvPr id="3" name="deckgen:decor"/>
           <p:cNvSpPr/>
           <p:nvPr/>
         </p:nvSpPr>
@@ -11184,7 +11184,7 @@
       </p:sp>
       <p:sp>
         <p:nvSpPr>
-          <p:cNvPr id="4" name="Oval 3"/>
+          <p:cNvPr id="4" name="deckgen:decor"/>
           <p:cNvSpPr/>
           <p:nvPr/>
         </p:nvSpPr>
@@ -12464,7 +12464,7 @@
       <p:grpSpPr/>
       <p:sp>
         <p:nvSpPr>
-          <p:cNvPr id="2" name="Oval 1"/>
+          <p:cNvPr id="2" name="deckgen:decor"/>
           <p:cNvSpPr/>
           <p:nvPr/>
         </p:nvSpPr>
@@ -12494,7 +12494,7 @@
       </p:sp>
       <p:sp>
         <p:nvSpPr>
-          <p:cNvPr id="3" name="Oval 2"/>
+          <p:cNvPr id="3" name="deckgen:decor"/>
           <p:cNvSpPr/>
           <p:nvPr/>
         </p:nvSpPr>
@@ -12524,7 +12524,7 @@
       </p:sp>
       <p:sp>
         <p:nvSpPr>
-          <p:cNvPr id="4" name="Oval 3"/>
+          <p:cNvPr id="4" name="deckgen:decor"/>
           <p:cNvSpPr/>
           <p:nvPr/>
         </p:nvSpPr>
@@ -12730,7 +12730,7 @@
       </p:sp>
       <p:sp>
         <p:nvSpPr>
-          <p:cNvPr id="10" name="TextBox 9"/>
+          <p:cNvPr id="10" name="deckgen:ornament"/>
           <p:cNvSpPr txBox="1"/>
           <p:nvPr/>
         </p:nvSpPr>
@@ -12915,7 +12915,7 @@
       </p:sp>
       <p:sp>
         <p:nvSpPr>
-          <p:cNvPr id="14" name="TextBox 13"/>
+          <p:cNvPr id="14" name="deckgen:ornament"/>
           <p:cNvSpPr txBox="1"/>
           <p:nvPr/>
         </p:nvSpPr>
@@ -13100,7 +13100,7 @@
       </p:sp>
       <p:sp>
         <p:nvSpPr>
-          <p:cNvPr id="18" name="TextBox 17"/>
+          <p:cNvPr id="18" name="deckgen:ornament"/>
           <p:cNvSpPr txBox="1"/>
           <p:nvPr/>
         </p:nvSpPr>
@@ -13422,7 +13422,7 @@
       <p:grpSpPr/>
       <p:sp>
         <p:nvSpPr>
-          <p:cNvPr id="2" name="Oval 1"/>
+          <p:cNvPr id="2" name="deckgen:decor"/>
           <p:cNvSpPr/>
           <p:nvPr/>
         </p:nvSpPr>
@@ -13452,7 +13452,7 @@
       </p:sp>
       <p:sp>
         <p:nvSpPr>
-          <p:cNvPr id="3" name="Oval 2"/>
+          <p:cNvPr id="3" name="deckgen:decor"/>
           <p:cNvSpPr/>
           <p:nvPr/>
         </p:nvSpPr>
@@ -13482,7 +13482,7 @@
       </p:sp>
       <p:sp>
         <p:nvSpPr>
-          <p:cNvPr id="4" name="Oval 3"/>
+          <p:cNvPr id="4" name="deckgen:decor"/>
           <p:cNvSpPr/>
           <p:nvPr/>
         </p:nvSpPr>
@@ -14483,7 +14483,7 @@
       <p:grpSpPr/>
       <p:sp>
         <p:nvSpPr>
-          <p:cNvPr id="2" name="Oval 1"/>
+          <p:cNvPr id="2" name="deckgen:decor"/>
           <p:cNvSpPr/>
           <p:nvPr/>
         </p:nvSpPr>
@@ -14513,7 +14513,7 @@
       </p:sp>
       <p:sp>
         <p:nvSpPr>
-          <p:cNvPr id="3" name="Oval 2"/>
+          <p:cNvPr id="3" name="deckgen:decor"/>
           <p:cNvSpPr/>
           <p:nvPr/>
         </p:nvSpPr>
@@ -14543,7 +14543,7 @@
       </p:sp>
       <p:sp>
         <p:nvSpPr>
-          <p:cNvPr id="4" name="Oval 3"/>
+          <p:cNvPr id="4" name="deckgen:decor"/>
           <p:cNvSpPr/>
           <p:nvPr/>
         </p:nvSpPr>
